--- a/public/videos/repositories/eki-genre-map/eki-genre-map-tech-preview.pptx
+++ b/public/videos/repositories/eki-genre-map/eki-genre-map-tech-preview.pptx
@@ -134,7 +134,7 @@
           <p:cNvPr id="2" name="タイトル 1">
             <a:extLst>
               <a:ext uri="{FF2B5EF4-FFF2-40B4-BE49-F238E27FC236}">
-                <a16:creationId xmlns:a16="http://schemas.microsoft.com/office/drawing/2014/main" id="{8C235BBB-33A8-C4CA-1C7F-D01E3279BFE0}"/>
+                <a16:creationId xmlns:a16="http://schemas.microsoft.com/office/drawing/2014/main" id="{3176840A-6C99-EE22-EE73-DD4D09E87F40}"/>
               </a:ext>
             </a:extLst>
           </p:cNvPr>
@@ -171,7 +171,7 @@
           <p:cNvPr id="3" name="字幕 2">
             <a:extLst>
               <a:ext uri="{FF2B5EF4-FFF2-40B4-BE49-F238E27FC236}">
-                <a16:creationId xmlns:a16="http://schemas.microsoft.com/office/drawing/2014/main" id="{4BBE45B1-2D20-9C59-B6B0-3F4CCA302534}"/>
+                <a16:creationId xmlns:a16="http://schemas.microsoft.com/office/drawing/2014/main" id="{36201439-8F87-6AD7-7577-2C0C83373D36}"/>
               </a:ext>
             </a:extLst>
           </p:cNvPr>
@@ -241,7 +241,7 @@
           <p:cNvPr id="4" name="日付プレースホルダー 3">
             <a:extLst>
               <a:ext uri="{FF2B5EF4-FFF2-40B4-BE49-F238E27FC236}">
-                <a16:creationId xmlns:a16="http://schemas.microsoft.com/office/drawing/2014/main" id="{39945DBC-9348-19AC-736C-7323654D06EF}"/>
+                <a16:creationId xmlns:a16="http://schemas.microsoft.com/office/drawing/2014/main" id="{AC3D8AA1-2E0E-48EB-1EE3-7FA4B0485322}"/>
               </a:ext>
             </a:extLst>
           </p:cNvPr>
@@ -257,7 +257,7 @@
           <a:bodyPr/>
           <a:lstStyle/>
           <a:p>
-            <a:fld id="{AABD3B51-C85E-4F83-AC20-154779F16B65}" type="datetimeFigureOut">
+            <a:fld id="{1FBBDFD1-0467-4902-914D-89D175116486}" type="datetimeFigureOut">
               <a:rPr kumimoji="1" lang="ja-JP" altLang="en-US" smtClean="0"/>
               <a:t>2026/7/30</a:t>
             </a:fld>
@@ -270,7 +270,7 @@
           <p:cNvPr id="5" name="フッター プレースホルダー 4">
             <a:extLst>
               <a:ext uri="{FF2B5EF4-FFF2-40B4-BE49-F238E27FC236}">
-                <a16:creationId xmlns:a16="http://schemas.microsoft.com/office/drawing/2014/main" id="{3826B38D-58A8-74CC-B7A0-56C28BC2B94F}"/>
+                <a16:creationId xmlns:a16="http://schemas.microsoft.com/office/drawing/2014/main" id="{37BDC19A-FF84-11C0-9B5D-1B5B31575FB1}"/>
               </a:ext>
             </a:extLst>
           </p:cNvPr>
@@ -295,7 +295,7 @@
           <p:cNvPr id="6" name="スライド番号プレースホルダー 5">
             <a:extLst>
               <a:ext uri="{FF2B5EF4-FFF2-40B4-BE49-F238E27FC236}">
-                <a16:creationId xmlns:a16="http://schemas.microsoft.com/office/drawing/2014/main" id="{B37DD842-3F5B-2712-F84D-147276AAB17D}"/>
+                <a16:creationId xmlns:a16="http://schemas.microsoft.com/office/drawing/2014/main" id="{E570F84A-7742-25A2-31D6-CC96FE85B31A}"/>
               </a:ext>
             </a:extLst>
           </p:cNvPr>
@@ -311,7 +311,7 @@
           <a:bodyPr/>
           <a:lstStyle/>
           <a:p>
-            <a:fld id="{7BC6C0E1-D38F-4F92-82C9-5480A080A4DC}" type="slidenum">
+            <a:fld id="{12352951-C661-4FE7-ACEA-8547EF5D613A}" type="slidenum">
               <a:rPr kumimoji="1" lang="ja-JP" altLang="en-US" smtClean="0"/>
               <a:t>‹#›</a:t>
             </a:fld>
@@ -322,7 +322,7 @@
     </p:spTree>
     <p:extLst>
       <p:ext uri="{BB962C8B-B14F-4D97-AF65-F5344CB8AC3E}">
-        <p14:creationId xmlns:p14="http://schemas.microsoft.com/office/powerpoint/2010/main" val="993149868"/>
+        <p14:creationId xmlns:p14="http://schemas.microsoft.com/office/powerpoint/2010/main" val="935316507"/>
       </p:ext>
     </p:extLst>
   </p:cSld>
@@ -354,7 +354,7 @@
           <p:cNvPr id="2" name="タイトル 1">
             <a:extLst>
               <a:ext uri="{FF2B5EF4-FFF2-40B4-BE49-F238E27FC236}">
-                <a16:creationId xmlns:a16="http://schemas.microsoft.com/office/drawing/2014/main" id="{171FDACF-A784-65FB-B677-ADB6C49C3125}"/>
+                <a16:creationId xmlns:a16="http://schemas.microsoft.com/office/drawing/2014/main" id="{A350F9FC-C2F2-6536-B63A-9E2532C7BCA2}"/>
               </a:ext>
             </a:extLst>
           </p:cNvPr>
@@ -382,7 +382,7 @@
           <p:cNvPr id="3" name="縦書きテキスト プレースホルダー 2">
             <a:extLst>
               <a:ext uri="{FF2B5EF4-FFF2-40B4-BE49-F238E27FC236}">
-                <a16:creationId xmlns:a16="http://schemas.microsoft.com/office/drawing/2014/main" id="{EAC24A67-C92C-541F-4D9A-B2D209674898}"/>
+                <a16:creationId xmlns:a16="http://schemas.microsoft.com/office/drawing/2014/main" id="{D4E06D31-1EFB-444C-2F07-6C282327B2AD}"/>
               </a:ext>
             </a:extLst>
           </p:cNvPr>
@@ -471,7 +471,7 @@
           <p:cNvPr id="4" name="日付プレースホルダー 3">
             <a:extLst>
               <a:ext uri="{FF2B5EF4-FFF2-40B4-BE49-F238E27FC236}">
-                <a16:creationId xmlns:a16="http://schemas.microsoft.com/office/drawing/2014/main" id="{C1BFE300-BA82-7696-32C8-B96D76E84363}"/>
+                <a16:creationId xmlns:a16="http://schemas.microsoft.com/office/drawing/2014/main" id="{DACB3641-B864-42F0-09A4-71B484BC81C9}"/>
               </a:ext>
             </a:extLst>
           </p:cNvPr>
@@ -487,7 +487,7 @@
           <a:bodyPr/>
           <a:lstStyle/>
           <a:p>
-            <a:fld id="{AABD3B51-C85E-4F83-AC20-154779F16B65}" type="datetimeFigureOut">
+            <a:fld id="{1FBBDFD1-0467-4902-914D-89D175116486}" type="datetimeFigureOut">
               <a:rPr kumimoji="1" lang="ja-JP" altLang="en-US" smtClean="0"/>
               <a:t>2026/7/30</a:t>
             </a:fld>
@@ -500,7 +500,7 @@
           <p:cNvPr id="5" name="フッター プレースホルダー 4">
             <a:extLst>
               <a:ext uri="{FF2B5EF4-FFF2-40B4-BE49-F238E27FC236}">
-                <a16:creationId xmlns:a16="http://schemas.microsoft.com/office/drawing/2014/main" id="{5C9F3AAE-32AB-DB06-9488-942D77F2F781}"/>
+                <a16:creationId xmlns:a16="http://schemas.microsoft.com/office/drawing/2014/main" id="{A18234B4-C6F8-F40C-12C1-54F402890E51}"/>
               </a:ext>
             </a:extLst>
           </p:cNvPr>
@@ -525,7 +525,7 @@
           <p:cNvPr id="6" name="スライド番号プレースホルダー 5">
             <a:extLst>
               <a:ext uri="{FF2B5EF4-FFF2-40B4-BE49-F238E27FC236}">
-                <a16:creationId xmlns:a16="http://schemas.microsoft.com/office/drawing/2014/main" id="{E7E45464-45C9-82E2-5071-88FD351317A5}"/>
+                <a16:creationId xmlns:a16="http://schemas.microsoft.com/office/drawing/2014/main" id="{3C2E8AEC-B1CD-DBDE-7359-28EEEFC1822D}"/>
               </a:ext>
             </a:extLst>
           </p:cNvPr>
@@ -541,7 +541,7 @@
           <a:bodyPr/>
           <a:lstStyle/>
           <a:p>
-            <a:fld id="{7BC6C0E1-D38F-4F92-82C9-5480A080A4DC}" type="slidenum">
+            <a:fld id="{12352951-C661-4FE7-ACEA-8547EF5D613A}" type="slidenum">
               <a:rPr kumimoji="1" lang="ja-JP" altLang="en-US" smtClean="0"/>
               <a:t>‹#›</a:t>
             </a:fld>
@@ -552,7 +552,7 @@
     </p:spTree>
     <p:extLst>
       <p:ext uri="{BB962C8B-B14F-4D97-AF65-F5344CB8AC3E}">
-        <p14:creationId xmlns:p14="http://schemas.microsoft.com/office/powerpoint/2010/main" val="1693971454"/>
+        <p14:creationId xmlns:p14="http://schemas.microsoft.com/office/powerpoint/2010/main" val="593768947"/>
       </p:ext>
     </p:extLst>
   </p:cSld>
@@ -584,7 +584,7 @@
           <p:cNvPr id="2" name="縦書きタイトル 1">
             <a:extLst>
               <a:ext uri="{FF2B5EF4-FFF2-40B4-BE49-F238E27FC236}">
-                <a16:creationId xmlns:a16="http://schemas.microsoft.com/office/drawing/2014/main" id="{C23AF90B-E0AC-DEE6-B190-912422715DDE}"/>
+                <a16:creationId xmlns:a16="http://schemas.microsoft.com/office/drawing/2014/main" id="{6CFE7139-5AF6-28B2-BF6B-2CED1220CFF7}"/>
               </a:ext>
             </a:extLst>
           </p:cNvPr>
@@ -617,7 +617,7 @@
           <p:cNvPr id="3" name="縦書きテキスト プレースホルダー 2">
             <a:extLst>
               <a:ext uri="{FF2B5EF4-FFF2-40B4-BE49-F238E27FC236}">
-                <a16:creationId xmlns:a16="http://schemas.microsoft.com/office/drawing/2014/main" id="{8E64D19B-1465-7048-9532-94C85CB0D64B}"/>
+                <a16:creationId xmlns:a16="http://schemas.microsoft.com/office/drawing/2014/main" id="{150445DA-48E6-3D2E-866B-9EB0AE48BC84}"/>
               </a:ext>
             </a:extLst>
           </p:cNvPr>
@@ -711,7 +711,7 @@
           <p:cNvPr id="4" name="日付プレースホルダー 3">
             <a:extLst>
               <a:ext uri="{FF2B5EF4-FFF2-40B4-BE49-F238E27FC236}">
-                <a16:creationId xmlns:a16="http://schemas.microsoft.com/office/drawing/2014/main" id="{0F937E65-4ED2-2E06-C6BD-219BF8B66DE1}"/>
+                <a16:creationId xmlns:a16="http://schemas.microsoft.com/office/drawing/2014/main" id="{92335021-13A8-B64F-4F59-4A66B278C9BE}"/>
               </a:ext>
             </a:extLst>
           </p:cNvPr>
@@ -727,7 +727,7 @@
           <a:bodyPr/>
           <a:lstStyle/>
           <a:p>
-            <a:fld id="{AABD3B51-C85E-4F83-AC20-154779F16B65}" type="datetimeFigureOut">
+            <a:fld id="{1FBBDFD1-0467-4902-914D-89D175116486}" type="datetimeFigureOut">
               <a:rPr kumimoji="1" lang="ja-JP" altLang="en-US" smtClean="0"/>
               <a:t>2026/7/30</a:t>
             </a:fld>
@@ -740,7 +740,7 @@
           <p:cNvPr id="5" name="フッター プレースホルダー 4">
             <a:extLst>
               <a:ext uri="{FF2B5EF4-FFF2-40B4-BE49-F238E27FC236}">
-                <a16:creationId xmlns:a16="http://schemas.microsoft.com/office/drawing/2014/main" id="{1C8B3158-7237-A4ED-E11D-786FEDA35FFB}"/>
+                <a16:creationId xmlns:a16="http://schemas.microsoft.com/office/drawing/2014/main" id="{6F7859D6-3C4A-71D4-2304-BBFE148D1B18}"/>
               </a:ext>
             </a:extLst>
           </p:cNvPr>
@@ -765,7 +765,7 @@
           <p:cNvPr id="6" name="スライド番号プレースホルダー 5">
             <a:extLst>
               <a:ext uri="{FF2B5EF4-FFF2-40B4-BE49-F238E27FC236}">
-                <a16:creationId xmlns:a16="http://schemas.microsoft.com/office/drawing/2014/main" id="{1FB74ED5-9943-0BC3-B43B-1395B6BE3E9B}"/>
+                <a16:creationId xmlns:a16="http://schemas.microsoft.com/office/drawing/2014/main" id="{F9B33C3B-0A07-3668-148D-09D27573DCE1}"/>
               </a:ext>
             </a:extLst>
           </p:cNvPr>
@@ -781,7 +781,7 @@
           <a:bodyPr/>
           <a:lstStyle/>
           <a:p>
-            <a:fld id="{7BC6C0E1-D38F-4F92-82C9-5480A080A4DC}" type="slidenum">
+            <a:fld id="{12352951-C661-4FE7-ACEA-8547EF5D613A}" type="slidenum">
               <a:rPr kumimoji="1" lang="ja-JP" altLang="en-US" smtClean="0"/>
               <a:t>‹#›</a:t>
             </a:fld>
@@ -792,7 +792,7 @@
     </p:spTree>
     <p:extLst>
       <p:ext uri="{BB962C8B-B14F-4D97-AF65-F5344CB8AC3E}">
-        <p14:creationId xmlns:p14="http://schemas.microsoft.com/office/powerpoint/2010/main" val="2118148704"/>
+        <p14:creationId xmlns:p14="http://schemas.microsoft.com/office/powerpoint/2010/main" val="2289839250"/>
       </p:ext>
     </p:extLst>
   </p:cSld>
@@ -824,7 +824,7 @@
           <p:cNvPr id="2" name="タイトル 1">
             <a:extLst>
               <a:ext uri="{FF2B5EF4-FFF2-40B4-BE49-F238E27FC236}">
-                <a16:creationId xmlns:a16="http://schemas.microsoft.com/office/drawing/2014/main" id="{1390D83E-772C-50A7-FFA1-2E65794912B2}"/>
+                <a16:creationId xmlns:a16="http://schemas.microsoft.com/office/drawing/2014/main" id="{A9694ED3-CEC7-44AF-C32B-D6473022036F}"/>
               </a:ext>
             </a:extLst>
           </p:cNvPr>
@@ -852,7 +852,7 @@
           <p:cNvPr id="3" name="コンテンツ プレースホルダー 2">
             <a:extLst>
               <a:ext uri="{FF2B5EF4-FFF2-40B4-BE49-F238E27FC236}">
-                <a16:creationId xmlns:a16="http://schemas.microsoft.com/office/drawing/2014/main" id="{68FC359F-A93A-4B93-7328-5B48BA40109A}"/>
+                <a16:creationId xmlns:a16="http://schemas.microsoft.com/office/drawing/2014/main" id="{E3058855-EC31-07EF-4B2E-55C42F46624C}"/>
               </a:ext>
             </a:extLst>
           </p:cNvPr>
@@ -941,7 +941,7 @@
           <p:cNvPr id="4" name="日付プレースホルダー 3">
             <a:extLst>
               <a:ext uri="{FF2B5EF4-FFF2-40B4-BE49-F238E27FC236}">
-                <a16:creationId xmlns:a16="http://schemas.microsoft.com/office/drawing/2014/main" id="{727974EC-2BEB-B269-A9AB-D0F5A35F8DCD}"/>
+                <a16:creationId xmlns:a16="http://schemas.microsoft.com/office/drawing/2014/main" id="{2FAECF86-B99F-5BA1-9EF0-81D72DD9003F}"/>
               </a:ext>
             </a:extLst>
           </p:cNvPr>
@@ -957,7 +957,7 @@
           <a:bodyPr/>
           <a:lstStyle/>
           <a:p>
-            <a:fld id="{AABD3B51-C85E-4F83-AC20-154779F16B65}" type="datetimeFigureOut">
+            <a:fld id="{1FBBDFD1-0467-4902-914D-89D175116486}" type="datetimeFigureOut">
               <a:rPr kumimoji="1" lang="ja-JP" altLang="en-US" smtClean="0"/>
               <a:t>2026/7/30</a:t>
             </a:fld>
@@ -970,7 +970,7 @@
           <p:cNvPr id="5" name="フッター プレースホルダー 4">
             <a:extLst>
               <a:ext uri="{FF2B5EF4-FFF2-40B4-BE49-F238E27FC236}">
-                <a16:creationId xmlns:a16="http://schemas.microsoft.com/office/drawing/2014/main" id="{37408D4E-1BC1-85CC-3F64-4D7C0ACCE2E6}"/>
+                <a16:creationId xmlns:a16="http://schemas.microsoft.com/office/drawing/2014/main" id="{B1FCE688-6C6D-D4DF-6D9C-BA8B1C6470E3}"/>
               </a:ext>
             </a:extLst>
           </p:cNvPr>
@@ -995,7 +995,7 @@
           <p:cNvPr id="6" name="スライド番号プレースホルダー 5">
             <a:extLst>
               <a:ext uri="{FF2B5EF4-FFF2-40B4-BE49-F238E27FC236}">
-                <a16:creationId xmlns:a16="http://schemas.microsoft.com/office/drawing/2014/main" id="{4DA16AAB-CF35-5935-8869-D741335FA064}"/>
+                <a16:creationId xmlns:a16="http://schemas.microsoft.com/office/drawing/2014/main" id="{23A8CBEA-0CB5-5588-B35F-AF689953C98E}"/>
               </a:ext>
             </a:extLst>
           </p:cNvPr>
@@ -1011,7 +1011,7 @@
           <a:bodyPr/>
           <a:lstStyle/>
           <a:p>
-            <a:fld id="{7BC6C0E1-D38F-4F92-82C9-5480A080A4DC}" type="slidenum">
+            <a:fld id="{12352951-C661-4FE7-ACEA-8547EF5D613A}" type="slidenum">
               <a:rPr kumimoji="1" lang="ja-JP" altLang="en-US" smtClean="0"/>
               <a:t>‹#›</a:t>
             </a:fld>
@@ -1022,7 +1022,7 @@
     </p:spTree>
     <p:extLst>
       <p:ext uri="{BB962C8B-B14F-4D97-AF65-F5344CB8AC3E}">
-        <p14:creationId xmlns:p14="http://schemas.microsoft.com/office/powerpoint/2010/main" val="3903812202"/>
+        <p14:creationId xmlns:p14="http://schemas.microsoft.com/office/powerpoint/2010/main" val="1860743510"/>
       </p:ext>
     </p:extLst>
   </p:cSld>
@@ -1054,7 +1054,7 @@
           <p:cNvPr id="2" name="タイトル 1">
             <a:extLst>
               <a:ext uri="{FF2B5EF4-FFF2-40B4-BE49-F238E27FC236}">
-                <a16:creationId xmlns:a16="http://schemas.microsoft.com/office/drawing/2014/main" id="{BE0893DB-60F4-352B-8779-D0BD07C3E62B}"/>
+                <a16:creationId xmlns:a16="http://schemas.microsoft.com/office/drawing/2014/main" id="{BBDC5993-FE29-2A69-F677-AF8D1114D574}"/>
               </a:ext>
             </a:extLst>
           </p:cNvPr>
@@ -1091,7 +1091,7 @@
           <p:cNvPr id="3" name="テキスト プレースホルダー 2">
             <a:extLst>
               <a:ext uri="{FF2B5EF4-FFF2-40B4-BE49-F238E27FC236}">
-                <a16:creationId xmlns:a16="http://schemas.microsoft.com/office/drawing/2014/main" id="{81709DA9-9125-ADFD-975D-96E437171209}"/>
+                <a16:creationId xmlns:a16="http://schemas.microsoft.com/office/drawing/2014/main" id="{38B21464-041E-3FB7-503F-E8A912D72532}"/>
               </a:ext>
             </a:extLst>
           </p:cNvPr>
@@ -1216,7 +1216,7 @@
           <p:cNvPr id="4" name="日付プレースホルダー 3">
             <a:extLst>
               <a:ext uri="{FF2B5EF4-FFF2-40B4-BE49-F238E27FC236}">
-                <a16:creationId xmlns:a16="http://schemas.microsoft.com/office/drawing/2014/main" id="{7D57A0F2-4C77-CC06-DF41-52AC40DEA21B}"/>
+                <a16:creationId xmlns:a16="http://schemas.microsoft.com/office/drawing/2014/main" id="{741AE250-D401-158A-1015-2449E4B45B3D}"/>
               </a:ext>
             </a:extLst>
           </p:cNvPr>
@@ -1232,7 +1232,7 @@
           <a:bodyPr/>
           <a:lstStyle/>
           <a:p>
-            <a:fld id="{AABD3B51-C85E-4F83-AC20-154779F16B65}" type="datetimeFigureOut">
+            <a:fld id="{1FBBDFD1-0467-4902-914D-89D175116486}" type="datetimeFigureOut">
               <a:rPr kumimoji="1" lang="ja-JP" altLang="en-US" smtClean="0"/>
               <a:t>2026/7/30</a:t>
             </a:fld>
@@ -1245,7 +1245,7 @@
           <p:cNvPr id="5" name="フッター プレースホルダー 4">
             <a:extLst>
               <a:ext uri="{FF2B5EF4-FFF2-40B4-BE49-F238E27FC236}">
-                <a16:creationId xmlns:a16="http://schemas.microsoft.com/office/drawing/2014/main" id="{325291CA-0294-F72D-3A77-13B8DD1720D4}"/>
+                <a16:creationId xmlns:a16="http://schemas.microsoft.com/office/drawing/2014/main" id="{0E53D316-3428-36D4-1D69-9EAEE0786051}"/>
               </a:ext>
             </a:extLst>
           </p:cNvPr>
@@ -1270,7 +1270,7 @@
           <p:cNvPr id="6" name="スライド番号プレースホルダー 5">
             <a:extLst>
               <a:ext uri="{FF2B5EF4-FFF2-40B4-BE49-F238E27FC236}">
-                <a16:creationId xmlns:a16="http://schemas.microsoft.com/office/drawing/2014/main" id="{B5ECE4A2-AD3E-9209-956E-9C608E98CBF4}"/>
+                <a16:creationId xmlns:a16="http://schemas.microsoft.com/office/drawing/2014/main" id="{4B78300B-1C51-3A94-0CF5-5E4CE6D9535A}"/>
               </a:ext>
             </a:extLst>
           </p:cNvPr>
@@ -1286,7 +1286,7 @@
           <a:bodyPr/>
           <a:lstStyle/>
           <a:p>
-            <a:fld id="{7BC6C0E1-D38F-4F92-82C9-5480A080A4DC}" type="slidenum">
+            <a:fld id="{12352951-C661-4FE7-ACEA-8547EF5D613A}" type="slidenum">
               <a:rPr kumimoji="1" lang="ja-JP" altLang="en-US" smtClean="0"/>
               <a:t>‹#›</a:t>
             </a:fld>
@@ -1297,7 +1297,7 @@
     </p:spTree>
     <p:extLst>
       <p:ext uri="{BB962C8B-B14F-4D97-AF65-F5344CB8AC3E}">
-        <p14:creationId xmlns:p14="http://schemas.microsoft.com/office/powerpoint/2010/main" val="666764936"/>
+        <p14:creationId xmlns:p14="http://schemas.microsoft.com/office/powerpoint/2010/main" val="1358311564"/>
       </p:ext>
     </p:extLst>
   </p:cSld>
@@ -1329,7 +1329,7 @@
           <p:cNvPr id="2" name="タイトル 1">
             <a:extLst>
               <a:ext uri="{FF2B5EF4-FFF2-40B4-BE49-F238E27FC236}">
-                <a16:creationId xmlns:a16="http://schemas.microsoft.com/office/drawing/2014/main" id="{4722A5AC-5622-B475-2916-1BB17F23DD69}"/>
+                <a16:creationId xmlns:a16="http://schemas.microsoft.com/office/drawing/2014/main" id="{F63E730A-3563-771F-EA35-83BC50B29E4F}"/>
               </a:ext>
             </a:extLst>
           </p:cNvPr>
@@ -1357,7 +1357,7 @@
           <p:cNvPr id="3" name="コンテンツ プレースホルダー 2">
             <a:extLst>
               <a:ext uri="{FF2B5EF4-FFF2-40B4-BE49-F238E27FC236}">
-                <a16:creationId xmlns:a16="http://schemas.microsoft.com/office/drawing/2014/main" id="{3D93079B-AABB-50DD-8DEF-976C00FCF733}"/>
+                <a16:creationId xmlns:a16="http://schemas.microsoft.com/office/drawing/2014/main" id="{7A5CF686-ACB1-CCF8-7202-0EFAEF1E9BA9}"/>
               </a:ext>
             </a:extLst>
           </p:cNvPr>
@@ -1451,7 +1451,7 @@
           <p:cNvPr id="4" name="コンテンツ プレースホルダー 3">
             <a:extLst>
               <a:ext uri="{FF2B5EF4-FFF2-40B4-BE49-F238E27FC236}">
-                <a16:creationId xmlns:a16="http://schemas.microsoft.com/office/drawing/2014/main" id="{A24C7995-4772-D094-0465-2B4110C24DE0}"/>
+                <a16:creationId xmlns:a16="http://schemas.microsoft.com/office/drawing/2014/main" id="{EC537188-D573-2F63-392E-83C3721133DF}"/>
               </a:ext>
             </a:extLst>
           </p:cNvPr>
@@ -1545,7 +1545,7 @@
           <p:cNvPr id="5" name="日付プレースホルダー 4">
             <a:extLst>
               <a:ext uri="{FF2B5EF4-FFF2-40B4-BE49-F238E27FC236}">
-                <a16:creationId xmlns:a16="http://schemas.microsoft.com/office/drawing/2014/main" id="{22B71DCD-952E-1C3D-8168-11A14EFBC9F1}"/>
+                <a16:creationId xmlns:a16="http://schemas.microsoft.com/office/drawing/2014/main" id="{467576DC-A388-AF60-5071-31FE93D7B548}"/>
               </a:ext>
             </a:extLst>
           </p:cNvPr>
@@ -1561,7 +1561,7 @@
           <a:bodyPr/>
           <a:lstStyle/>
           <a:p>
-            <a:fld id="{AABD3B51-C85E-4F83-AC20-154779F16B65}" type="datetimeFigureOut">
+            <a:fld id="{1FBBDFD1-0467-4902-914D-89D175116486}" type="datetimeFigureOut">
               <a:rPr kumimoji="1" lang="ja-JP" altLang="en-US" smtClean="0"/>
               <a:t>2026/7/30</a:t>
             </a:fld>
@@ -1574,7 +1574,7 @@
           <p:cNvPr id="6" name="フッター プレースホルダー 5">
             <a:extLst>
               <a:ext uri="{FF2B5EF4-FFF2-40B4-BE49-F238E27FC236}">
-                <a16:creationId xmlns:a16="http://schemas.microsoft.com/office/drawing/2014/main" id="{FBCD15C7-3EC6-72EA-FC2B-22FC28177224}"/>
+                <a16:creationId xmlns:a16="http://schemas.microsoft.com/office/drawing/2014/main" id="{29D869AB-5023-9C70-49B8-4383D8850056}"/>
               </a:ext>
             </a:extLst>
           </p:cNvPr>
@@ -1599,7 +1599,7 @@
           <p:cNvPr id="7" name="スライド番号プレースホルダー 6">
             <a:extLst>
               <a:ext uri="{FF2B5EF4-FFF2-40B4-BE49-F238E27FC236}">
-                <a16:creationId xmlns:a16="http://schemas.microsoft.com/office/drawing/2014/main" id="{E64D60C8-0836-EB25-9116-DABAB775FE01}"/>
+                <a16:creationId xmlns:a16="http://schemas.microsoft.com/office/drawing/2014/main" id="{BE241D50-DD94-E1D1-796D-314C1EEFCD31}"/>
               </a:ext>
             </a:extLst>
           </p:cNvPr>
@@ -1615,7 +1615,7 @@
           <a:bodyPr/>
           <a:lstStyle/>
           <a:p>
-            <a:fld id="{7BC6C0E1-D38F-4F92-82C9-5480A080A4DC}" type="slidenum">
+            <a:fld id="{12352951-C661-4FE7-ACEA-8547EF5D613A}" type="slidenum">
               <a:rPr kumimoji="1" lang="ja-JP" altLang="en-US" smtClean="0"/>
               <a:t>‹#›</a:t>
             </a:fld>
@@ -1626,7 +1626,7 @@
     </p:spTree>
     <p:extLst>
       <p:ext uri="{BB962C8B-B14F-4D97-AF65-F5344CB8AC3E}">
-        <p14:creationId xmlns:p14="http://schemas.microsoft.com/office/powerpoint/2010/main" val="2141640232"/>
+        <p14:creationId xmlns:p14="http://schemas.microsoft.com/office/powerpoint/2010/main" val="3047447172"/>
       </p:ext>
     </p:extLst>
   </p:cSld>
@@ -1658,7 +1658,7 @@
           <p:cNvPr id="2" name="タイトル 1">
             <a:extLst>
               <a:ext uri="{FF2B5EF4-FFF2-40B4-BE49-F238E27FC236}">
-                <a16:creationId xmlns:a16="http://schemas.microsoft.com/office/drawing/2014/main" id="{C0F95A50-2950-90A1-193D-19B3AF64E637}"/>
+                <a16:creationId xmlns:a16="http://schemas.microsoft.com/office/drawing/2014/main" id="{8E6875D5-B9B1-841F-C346-61470F5F9A36}"/>
               </a:ext>
             </a:extLst>
           </p:cNvPr>
@@ -1691,7 +1691,7 @@
           <p:cNvPr id="3" name="テキスト プレースホルダー 2">
             <a:extLst>
               <a:ext uri="{FF2B5EF4-FFF2-40B4-BE49-F238E27FC236}">
-                <a16:creationId xmlns:a16="http://schemas.microsoft.com/office/drawing/2014/main" id="{6E1F5174-9895-1943-EF5A-BE5CD35665B8}"/>
+                <a16:creationId xmlns:a16="http://schemas.microsoft.com/office/drawing/2014/main" id="{477F63E2-37E2-E40B-8D61-F62E98FED678}"/>
               </a:ext>
             </a:extLst>
           </p:cNvPr>
@@ -1762,7 +1762,7 @@
           <p:cNvPr id="4" name="コンテンツ プレースホルダー 3">
             <a:extLst>
               <a:ext uri="{FF2B5EF4-FFF2-40B4-BE49-F238E27FC236}">
-                <a16:creationId xmlns:a16="http://schemas.microsoft.com/office/drawing/2014/main" id="{384544BE-1228-0438-8A09-C36337C91CA2}"/>
+                <a16:creationId xmlns:a16="http://schemas.microsoft.com/office/drawing/2014/main" id="{05460839-A972-73D8-BAA9-6D6662D55B1D}"/>
               </a:ext>
             </a:extLst>
           </p:cNvPr>
@@ -1856,7 +1856,7 @@
           <p:cNvPr id="5" name="テキスト プレースホルダー 4">
             <a:extLst>
               <a:ext uri="{FF2B5EF4-FFF2-40B4-BE49-F238E27FC236}">
-                <a16:creationId xmlns:a16="http://schemas.microsoft.com/office/drawing/2014/main" id="{2B2BEFDD-B284-A7EF-8B7C-041B218B54EC}"/>
+                <a16:creationId xmlns:a16="http://schemas.microsoft.com/office/drawing/2014/main" id="{E666FEA5-F8CA-35BB-F8BE-2E63D02E36B3}"/>
               </a:ext>
             </a:extLst>
           </p:cNvPr>
@@ -1927,7 +1927,7 @@
           <p:cNvPr id="6" name="コンテンツ プレースホルダー 5">
             <a:extLst>
               <a:ext uri="{FF2B5EF4-FFF2-40B4-BE49-F238E27FC236}">
-                <a16:creationId xmlns:a16="http://schemas.microsoft.com/office/drawing/2014/main" id="{418986C4-94B8-DB1F-0B64-7E44DEB2254E}"/>
+                <a16:creationId xmlns:a16="http://schemas.microsoft.com/office/drawing/2014/main" id="{17F7507E-9D40-F2EC-27BE-8DC8C45444BB}"/>
               </a:ext>
             </a:extLst>
           </p:cNvPr>
@@ -2021,7 +2021,7 @@
           <p:cNvPr id="7" name="日付プレースホルダー 6">
             <a:extLst>
               <a:ext uri="{FF2B5EF4-FFF2-40B4-BE49-F238E27FC236}">
-                <a16:creationId xmlns:a16="http://schemas.microsoft.com/office/drawing/2014/main" id="{C8381528-8542-E684-C28C-2E34663EB70D}"/>
+                <a16:creationId xmlns:a16="http://schemas.microsoft.com/office/drawing/2014/main" id="{5FEDDF7E-CE3E-0F09-764D-A3430C5FC7C0}"/>
               </a:ext>
             </a:extLst>
           </p:cNvPr>
@@ -2037,7 +2037,7 @@
           <a:bodyPr/>
           <a:lstStyle/>
           <a:p>
-            <a:fld id="{AABD3B51-C85E-4F83-AC20-154779F16B65}" type="datetimeFigureOut">
+            <a:fld id="{1FBBDFD1-0467-4902-914D-89D175116486}" type="datetimeFigureOut">
               <a:rPr kumimoji="1" lang="ja-JP" altLang="en-US" smtClean="0"/>
               <a:t>2026/7/30</a:t>
             </a:fld>
@@ -2050,7 +2050,7 @@
           <p:cNvPr id="8" name="フッター プレースホルダー 7">
             <a:extLst>
               <a:ext uri="{FF2B5EF4-FFF2-40B4-BE49-F238E27FC236}">
-                <a16:creationId xmlns:a16="http://schemas.microsoft.com/office/drawing/2014/main" id="{C509B26C-018C-178C-55D9-6628E4FB122C}"/>
+                <a16:creationId xmlns:a16="http://schemas.microsoft.com/office/drawing/2014/main" id="{7F89D61A-C69D-E4F6-47DC-512A7255DD54}"/>
               </a:ext>
             </a:extLst>
           </p:cNvPr>
@@ -2075,7 +2075,7 @@
           <p:cNvPr id="9" name="スライド番号プレースホルダー 8">
             <a:extLst>
               <a:ext uri="{FF2B5EF4-FFF2-40B4-BE49-F238E27FC236}">
-                <a16:creationId xmlns:a16="http://schemas.microsoft.com/office/drawing/2014/main" id="{20D15FAA-5AF2-4F2D-8A61-D7C1616DBB21}"/>
+                <a16:creationId xmlns:a16="http://schemas.microsoft.com/office/drawing/2014/main" id="{331F84AE-E973-D56A-AFE2-58530E696766}"/>
               </a:ext>
             </a:extLst>
           </p:cNvPr>
@@ -2091,7 +2091,7 @@
           <a:bodyPr/>
           <a:lstStyle/>
           <a:p>
-            <a:fld id="{7BC6C0E1-D38F-4F92-82C9-5480A080A4DC}" type="slidenum">
+            <a:fld id="{12352951-C661-4FE7-ACEA-8547EF5D613A}" type="slidenum">
               <a:rPr kumimoji="1" lang="ja-JP" altLang="en-US" smtClean="0"/>
               <a:t>‹#›</a:t>
             </a:fld>
@@ -2102,7 +2102,7 @@
     </p:spTree>
     <p:extLst>
       <p:ext uri="{BB962C8B-B14F-4D97-AF65-F5344CB8AC3E}">
-        <p14:creationId xmlns:p14="http://schemas.microsoft.com/office/powerpoint/2010/main" val="2268227359"/>
+        <p14:creationId xmlns:p14="http://schemas.microsoft.com/office/powerpoint/2010/main" val="2511674576"/>
       </p:ext>
     </p:extLst>
   </p:cSld>
@@ -2134,7 +2134,7 @@
           <p:cNvPr id="2" name="タイトル 1">
             <a:extLst>
               <a:ext uri="{FF2B5EF4-FFF2-40B4-BE49-F238E27FC236}">
-                <a16:creationId xmlns:a16="http://schemas.microsoft.com/office/drawing/2014/main" id="{A8CB1795-310A-87FF-C1BC-AB1F90E4D874}"/>
+                <a16:creationId xmlns:a16="http://schemas.microsoft.com/office/drawing/2014/main" id="{B1C1FEF2-06EA-D72A-E5A1-F927B8FE40B0}"/>
               </a:ext>
             </a:extLst>
           </p:cNvPr>
@@ -2162,7 +2162,7 @@
           <p:cNvPr id="3" name="日付プレースホルダー 2">
             <a:extLst>
               <a:ext uri="{FF2B5EF4-FFF2-40B4-BE49-F238E27FC236}">
-                <a16:creationId xmlns:a16="http://schemas.microsoft.com/office/drawing/2014/main" id="{5A7B59D3-0BC7-5BAF-C504-51E7545A47CC}"/>
+                <a16:creationId xmlns:a16="http://schemas.microsoft.com/office/drawing/2014/main" id="{73F852BE-9201-85E3-4369-38782A223F22}"/>
               </a:ext>
             </a:extLst>
           </p:cNvPr>
@@ -2178,7 +2178,7 @@
           <a:bodyPr/>
           <a:lstStyle/>
           <a:p>
-            <a:fld id="{AABD3B51-C85E-4F83-AC20-154779F16B65}" type="datetimeFigureOut">
+            <a:fld id="{1FBBDFD1-0467-4902-914D-89D175116486}" type="datetimeFigureOut">
               <a:rPr kumimoji="1" lang="ja-JP" altLang="en-US" smtClean="0"/>
               <a:t>2026/7/30</a:t>
             </a:fld>
@@ -2191,7 +2191,7 @@
           <p:cNvPr id="4" name="フッター プレースホルダー 3">
             <a:extLst>
               <a:ext uri="{FF2B5EF4-FFF2-40B4-BE49-F238E27FC236}">
-                <a16:creationId xmlns:a16="http://schemas.microsoft.com/office/drawing/2014/main" id="{B732C666-10D5-A325-2C01-9613E6D490FE}"/>
+                <a16:creationId xmlns:a16="http://schemas.microsoft.com/office/drawing/2014/main" id="{4521ED33-A019-B494-45DF-2D333D977B9A}"/>
               </a:ext>
             </a:extLst>
           </p:cNvPr>
@@ -2216,7 +2216,7 @@
           <p:cNvPr id="5" name="スライド番号プレースホルダー 4">
             <a:extLst>
               <a:ext uri="{FF2B5EF4-FFF2-40B4-BE49-F238E27FC236}">
-                <a16:creationId xmlns:a16="http://schemas.microsoft.com/office/drawing/2014/main" id="{697C0219-305A-DF33-859C-583F27A8B919}"/>
+                <a16:creationId xmlns:a16="http://schemas.microsoft.com/office/drawing/2014/main" id="{83771BF7-B3BF-3265-DDDB-74DAFF3552FE}"/>
               </a:ext>
             </a:extLst>
           </p:cNvPr>
@@ -2232,7 +2232,7 @@
           <a:bodyPr/>
           <a:lstStyle/>
           <a:p>
-            <a:fld id="{7BC6C0E1-D38F-4F92-82C9-5480A080A4DC}" type="slidenum">
+            <a:fld id="{12352951-C661-4FE7-ACEA-8547EF5D613A}" type="slidenum">
               <a:rPr kumimoji="1" lang="ja-JP" altLang="en-US" smtClean="0"/>
               <a:t>‹#›</a:t>
             </a:fld>
@@ -2243,7 +2243,7 @@
     </p:spTree>
     <p:extLst>
       <p:ext uri="{BB962C8B-B14F-4D97-AF65-F5344CB8AC3E}">
-        <p14:creationId xmlns:p14="http://schemas.microsoft.com/office/powerpoint/2010/main" val="4269681611"/>
+        <p14:creationId xmlns:p14="http://schemas.microsoft.com/office/powerpoint/2010/main" val="3064352809"/>
       </p:ext>
     </p:extLst>
   </p:cSld>
@@ -2275,7 +2275,7 @@
           <p:cNvPr id="2" name="日付プレースホルダー 1">
             <a:extLst>
               <a:ext uri="{FF2B5EF4-FFF2-40B4-BE49-F238E27FC236}">
-                <a16:creationId xmlns:a16="http://schemas.microsoft.com/office/drawing/2014/main" id="{62CF474F-B662-2FAF-0B38-6EAD2595B941}"/>
+                <a16:creationId xmlns:a16="http://schemas.microsoft.com/office/drawing/2014/main" id="{B2E12319-375C-000D-5662-10E74D2DBDBD}"/>
               </a:ext>
             </a:extLst>
           </p:cNvPr>
@@ -2291,7 +2291,7 @@
           <a:bodyPr/>
           <a:lstStyle/>
           <a:p>
-            <a:fld id="{AABD3B51-C85E-4F83-AC20-154779F16B65}" type="datetimeFigureOut">
+            <a:fld id="{1FBBDFD1-0467-4902-914D-89D175116486}" type="datetimeFigureOut">
               <a:rPr kumimoji="1" lang="ja-JP" altLang="en-US" smtClean="0"/>
               <a:t>2026/7/30</a:t>
             </a:fld>
@@ -2304,7 +2304,7 @@
           <p:cNvPr id="3" name="フッター プレースホルダー 2">
             <a:extLst>
               <a:ext uri="{FF2B5EF4-FFF2-40B4-BE49-F238E27FC236}">
-                <a16:creationId xmlns:a16="http://schemas.microsoft.com/office/drawing/2014/main" id="{6B3FF6AC-1E3E-10B1-0AA4-4F5D7FE3013B}"/>
+                <a16:creationId xmlns:a16="http://schemas.microsoft.com/office/drawing/2014/main" id="{6DF1173B-016B-45B1-97FC-9B75B56D6444}"/>
               </a:ext>
             </a:extLst>
           </p:cNvPr>
@@ -2329,7 +2329,7 @@
           <p:cNvPr id="4" name="スライド番号プレースホルダー 3">
             <a:extLst>
               <a:ext uri="{FF2B5EF4-FFF2-40B4-BE49-F238E27FC236}">
-                <a16:creationId xmlns:a16="http://schemas.microsoft.com/office/drawing/2014/main" id="{BA12BB1E-2C6B-F393-BAF6-6074C3320366}"/>
+                <a16:creationId xmlns:a16="http://schemas.microsoft.com/office/drawing/2014/main" id="{566C9585-7376-A57F-0B70-35BECCB5DCED}"/>
               </a:ext>
             </a:extLst>
           </p:cNvPr>
@@ -2345,7 +2345,7 @@
           <a:bodyPr/>
           <a:lstStyle/>
           <a:p>
-            <a:fld id="{7BC6C0E1-D38F-4F92-82C9-5480A080A4DC}" type="slidenum">
+            <a:fld id="{12352951-C661-4FE7-ACEA-8547EF5D613A}" type="slidenum">
               <a:rPr kumimoji="1" lang="ja-JP" altLang="en-US" smtClean="0"/>
               <a:t>‹#›</a:t>
             </a:fld>
@@ -2356,7 +2356,7 @@
     </p:spTree>
     <p:extLst>
       <p:ext uri="{BB962C8B-B14F-4D97-AF65-F5344CB8AC3E}">
-        <p14:creationId xmlns:p14="http://schemas.microsoft.com/office/powerpoint/2010/main" val="2529913810"/>
+        <p14:creationId xmlns:p14="http://schemas.microsoft.com/office/powerpoint/2010/main" val="3094661791"/>
       </p:ext>
     </p:extLst>
   </p:cSld>
@@ -2388,7 +2388,7 @@
           <p:cNvPr id="2" name="タイトル 1">
             <a:extLst>
               <a:ext uri="{FF2B5EF4-FFF2-40B4-BE49-F238E27FC236}">
-                <a16:creationId xmlns:a16="http://schemas.microsoft.com/office/drawing/2014/main" id="{B045982D-8CC6-184D-C55C-DB1B02A20BFC}"/>
+                <a16:creationId xmlns:a16="http://schemas.microsoft.com/office/drawing/2014/main" id="{2162DB53-1FFD-3DCA-B43E-E94E88CC701D}"/>
               </a:ext>
             </a:extLst>
           </p:cNvPr>
@@ -2425,7 +2425,7 @@
           <p:cNvPr id="3" name="コンテンツ プレースホルダー 2">
             <a:extLst>
               <a:ext uri="{FF2B5EF4-FFF2-40B4-BE49-F238E27FC236}">
-                <a16:creationId xmlns:a16="http://schemas.microsoft.com/office/drawing/2014/main" id="{1658ABEF-540B-3D03-000B-4B2C2BDC84D5}"/>
+                <a16:creationId xmlns:a16="http://schemas.microsoft.com/office/drawing/2014/main" id="{84585286-FA0D-F175-04BE-C05ADD7B7BDD}"/>
               </a:ext>
             </a:extLst>
           </p:cNvPr>
@@ -2547,7 +2547,7 @@
           <p:cNvPr id="4" name="テキスト プレースホルダー 3">
             <a:extLst>
               <a:ext uri="{FF2B5EF4-FFF2-40B4-BE49-F238E27FC236}">
-                <a16:creationId xmlns:a16="http://schemas.microsoft.com/office/drawing/2014/main" id="{659B3731-7876-A050-29A5-0D5D8D3481F1}"/>
+                <a16:creationId xmlns:a16="http://schemas.microsoft.com/office/drawing/2014/main" id="{35F771D1-55D4-45E3-D8DF-1C23E8B06E96}"/>
               </a:ext>
             </a:extLst>
           </p:cNvPr>
@@ -2618,7 +2618,7 @@
           <p:cNvPr id="5" name="日付プレースホルダー 4">
             <a:extLst>
               <a:ext uri="{FF2B5EF4-FFF2-40B4-BE49-F238E27FC236}">
-                <a16:creationId xmlns:a16="http://schemas.microsoft.com/office/drawing/2014/main" id="{12FD7BCB-7933-B9F1-EDFD-7C71A23BE45F}"/>
+                <a16:creationId xmlns:a16="http://schemas.microsoft.com/office/drawing/2014/main" id="{787AA5B2-D729-93B3-C00E-25E635792889}"/>
               </a:ext>
             </a:extLst>
           </p:cNvPr>
@@ -2634,7 +2634,7 @@
           <a:bodyPr/>
           <a:lstStyle/>
           <a:p>
-            <a:fld id="{AABD3B51-C85E-4F83-AC20-154779F16B65}" type="datetimeFigureOut">
+            <a:fld id="{1FBBDFD1-0467-4902-914D-89D175116486}" type="datetimeFigureOut">
               <a:rPr kumimoji="1" lang="ja-JP" altLang="en-US" smtClean="0"/>
               <a:t>2026/7/30</a:t>
             </a:fld>
@@ -2647,7 +2647,7 @@
           <p:cNvPr id="6" name="フッター プレースホルダー 5">
             <a:extLst>
               <a:ext uri="{FF2B5EF4-FFF2-40B4-BE49-F238E27FC236}">
-                <a16:creationId xmlns:a16="http://schemas.microsoft.com/office/drawing/2014/main" id="{4F37B83B-0057-27E8-4285-93D5D92B0252}"/>
+                <a16:creationId xmlns:a16="http://schemas.microsoft.com/office/drawing/2014/main" id="{896DE09B-93E8-E252-6D83-399C5F1AC507}"/>
               </a:ext>
             </a:extLst>
           </p:cNvPr>
@@ -2672,7 +2672,7 @@
           <p:cNvPr id="7" name="スライド番号プレースホルダー 6">
             <a:extLst>
               <a:ext uri="{FF2B5EF4-FFF2-40B4-BE49-F238E27FC236}">
-                <a16:creationId xmlns:a16="http://schemas.microsoft.com/office/drawing/2014/main" id="{FBCF47EA-2867-B9A6-5DC0-0C4B3A93F2A9}"/>
+                <a16:creationId xmlns:a16="http://schemas.microsoft.com/office/drawing/2014/main" id="{FD4E713E-C3C1-85B0-0089-FFBE229A48C5}"/>
               </a:ext>
             </a:extLst>
           </p:cNvPr>
@@ -2688,7 +2688,7 @@
           <a:bodyPr/>
           <a:lstStyle/>
           <a:p>
-            <a:fld id="{7BC6C0E1-D38F-4F92-82C9-5480A080A4DC}" type="slidenum">
+            <a:fld id="{12352951-C661-4FE7-ACEA-8547EF5D613A}" type="slidenum">
               <a:rPr kumimoji="1" lang="ja-JP" altLang="en-US" smtClean="0"/>
               <a:t>‹#›</a:t>
             </a:fld>
@@ -2699,7 +2699,7 @@
     </p:spTree>
     <p:extLst>
       <p:ext uri="{BB962C8B-B14F-4D97-AF65-F5344CB8AC3E}">
-        <p14:creationId xmlns:p14="http://schemas.microsoft.com/office/powerpoint/2010/main" val="1677456713"/>
+        <p14:creationId xmlns:p14="http://schemas.microsoft.com/office/powerpoint/2010/main" val="1233885740"/>
       </p:ext>
     </p:extLst>
   </p:cSld>
@@ -2731,7 +2731,7 @@
           <p:cNvPr id="2" name="タイトル 1">
             <a:extLst>
               <a:ext uri="{FF2B5EF4-FFF2-40B4-BE49-F238E27FC236}">
-                <a16:creationId xmlns:a16="http://schemas.microsoft.com/office/drawing/2014/main" id="{2F8C6038-CEE8-3568-A1B5-6F98B7A0F863}"/>
+                <a16:creationId xmlns:a16="http://schemas.microsoft.com/office/drawing/2014/main" id="{79F3B525-9395-792F-DAC2-2BF9530256E6}"/>
               </a:ext>
             </a:extLst>
           </p:cNvPr>
@@ -2768,7 +2768,7 @@
           <p:cNvPr id="3" name="図プレースホルダー 2">
             <a:extLst>
               <a:ext uri="{FF2B5EF4-FFF2-40B4-BE49-F238E27FC236}">
-                <a16:creationId xmlns:a16="http://schemas.microsoft.com/office/drawing/2014/main" id="{B940029C-C922-A589-F2FA-21D4B3FA83BA}"/>
+                <a16:creationId xmlns:a16="http://schemas.microsoft.com/office/drawing/2014/main" id="{55C26437-98DB-7E77-22BB-C943CD5D1EB1}"/>
               </a:ext>
             </a:extLst>
           </p:cNvPr>
@@ -2835,7 +2835,7 @@
           <p:cNvPr id="4" name="テキスト プレースホルダー 3">
             <a:extLst>
               <a:ext uri="{FF2B5EF4-FFF2-40B4-BE49-F238E27FC236}">
-                <a16:creationId xmlns:a16="http://schemas.microsoft.com/office/drawing/2014/main" id="{4248F6E8-8B60-8341-CB46-50FC6E9FAC69}"/>
+                <a16:creationId xmlns:a16="http://schemas.microsoft.com/office/drawing/2014/main" id="{B601979D-8F95-6AF3-4DF8-ED3EA2A1F2D0}"/>
               </a:ext>
             </a:extLst>
           </p:cNvPr>
@@ -2906,7 +2906,7 @@
           <p:cNvPr id="5" name="日付プレースホルダー 4">
             <a:extLst>
               <a:ext uri="{FF2B5EF4-FFF2-40B4-BE49-F238E27FC236}">
-                <a16:creationId xmlns:a16="http://schemas.microsoft.com/office/drawing/2014/main" id="{ADC69692-217F-0310-10BE-7F3F5C20C681}"/>
+                <a16:creationId xmlns:a16="http://schemas.microsoft.com/office/drawing/2014/main" id="{BCB68067-C29E-D60A-A8EF-9305BF8B5D7D}"/>
               </a:ext>
             </a:extLst>
           </p:cNvPr>
@@ -2922,7 +2922,7 @@
           <a:bodyPr/>
           <a:lstStyle/>
           <a:p>
-            <a:fld id="{AABD3B51-C85E-4F83-AC20-154779F16B65}" type="datetimeFigureOut">
+            <a:fld id="{1FBBDFD1-0467-4902-914D-89D175116486}" type="datetimeFigureOut">
               <a:rPr kumimoji="1" lang="ja-JP" altLang="en-US" smtClean="0"/>
               <a:t>2026/7/30</a:t>
             </a:fld>
@@ -2935,7 +2935,7 @@
           <p:cNvPr id="6" name="フッター プレースホルダー 5">
             <a:extLst>
               <a:ext uri="{FF2B5EF4-FFF2-40B4-BE49-F238E27FC236}">
-                <a16:creationId xmlns:a16="http://schemas.microsoft.com/office/drawing/2014/main" id="{2656F3D1-5535-1F1F-D333-E98F1DAD96B4}"/>
+                <a16:creationId xmlns:a16="http://schemas.microsoft.com/office/drawing/2014/main" id="{7690D4AE-5E00-B775-A3CB-405A8A3542E6}"/>
               </a:ext>
             </a:extLst>
           </p:cNvPr>
@@ -2960,7 +2960,7 @@
           <p:cNvPr id="7" name="スライド番号プレースホルダー 6">
             <a:extLst>
               <a:ext uri="{FF2B5EF4-FFF2-40B4-BE49-F238E27FC236}">
-                <a16:creationId xmlns:a16="http://schemas.microsoft.com/office/drawing/2014/main" id="{F12AF8D5-6CBA-1200-5814-951510C8D634}"/>
+                <a16:creationId xmlns:a16="http://schemas.microsoft.com/office/drawing/2014/main" id="{048A60D4-451F-89FF-93B2-7131673BD186}"/>
               </a:ext>
             </a:extLst>
           </p:cNvPr>
@@ -2976,7 +2976,7 @@
           <a:bodyPr/>
           <a:lstStyle/>
           <a:p>
-            <a:fld id="{7BC6C0E1-D38F-4F92-82C9-5480A080A4DC}" type="slidenum">
+            <a:fld id="{12352951-C661-4FE7-ACEA-8547EF5D613A}" type="slidenum">
               <a:rPr kumimoji="1" lang="ja-JP" altLang="en-US" smtClean="0"/>
               <a:t>‹#›</a:t>
             </a:fld>
@@ -2987,7 +2987,7 @@
     </p:spTree>
     <p:extLst>
       <p:ext uri="{BB962C8B-B14F-4D97-AF65-F5344CB8AC3E}">
-        <p14:creationId xmlns:p14="http://schemas.microsoft.com/office/powerpoint/2010/main" val="681732744"/>
+        <p14:creationId xmlns:p14="http://schemas.microsoft.com/office/powerpoint/2010/main" val="418190429"/>
       </p:ext>
     </p:extLst>
   </p:cSld>
@@ -3024,7 +3024,7 @@
           <p:cNvPr id="2" name="タイトル プレースホルダー 1">
             <a:extLst>
               <a:ext uri="{FF2B5EF4-FFF2-40B4-BE49-F238E27FC236}">
-                <a16:creationId xmlns:a16="http://schemas.microsoft.com/office/drawing/2014/main" id="{4500EE5A-84C9-DBEF-3890-069BC8C3BFB3}"/>
+                <a16:creationId xmlns:a16="http://schemas.microsoft.com/office/drawing/2014/main" id="{47F43E8C-404C-6ACD-9E00-72754477C711}"/>
               </a:ext>
             </a:extLst>
           </p:cNvPr>
@@ -3062,7 +3062,7 @@
           <p:cNvPr id="3" name="テキスト プレースホルダー 2">
             <a:extLst>
               <a:ext uri="{FF2B5EF4-FFF2-40B4-BE49-F238E27FC236}">
-                <a16:creationId xmlns:a16="http://schemas.microsoft.com/office/drawing/2014/main" id="{291CB093-A44A-259E-5F68-0C6EEFD685C1}"/>
+                <a16:creationId xmlns:a16="http://schemas.microsoft.com/office/drawing/2014/main" id="{77A0A1A0-B3EF-24C1-EF16-ADF9D9054959}"/>
               </a:ext>
             </a:extLst>
           </p:cNvPr>
@@ -3161,7 +3161,7 @@
           <p:cNvPr id="4" name="日付プレースホルダー 3">
             <a:extLst>
               <a:ext uri="{FF2B5EF4-FFF2-40B4-BE49-F238E27FC236}">
-                <a16:creationId xmlns:a16="http://schemas.microsoft.com/office/drawing/2014/main" id="{B0DAE449-F8BD-4F6C-93F9-7075A2589C6D}"/>
+                <a16:creationId xmlns:a16="http://schemas.microsoft.com/office/drawing/2014/main" id="{C6DFC872-B915-5442-E971-09D3D653CFED}"/>
               </a:ext>
             </a:extLst>
           </p:cNvPr>
@@ -3195,7 +3195,7 @@
             </a:lvl1pPr>
           </a:lstStyle>
           <a:p>
-            <a:fld id="{AABD3B51-C85E-4F83-AC20-154779F16B65}" type="datetimeFigureOut">
+            <a:fld id="{1FBBDFD1-0467-4902-914D-89D175116486}" type="datetimeFigureOut">
               <a:rPr kumimoji="1" lang="ja-JP" altLang="en-US" smtClean="0"/>
               <a:t>2026/7/30</a:t>
             </a:fld>
@@ -3208,7 +3208,7 @@
           <p:cNvPr id="5" name="フッター プレースホルダー 4">
             <a:extLst>
               <a:ext uri="{FF2B5EF4-FFF2-40B4-BE49-F238E27FC236}">
-                <a16:creationId xmlns:a16="http://schemas.microsoft.com/office/drawing/2014/main" id="{F1D4DD9F-5219-EEEE-7DE1-661B3E7904D1}"/>
+                <a16:creationId xmlns:a16="http://schemas.microsoft.com/office/drawing/2014/main" id="{2FD66CD0-F831-F555-E348-A2E2B0780408}"/>
               </a:ext>
             </a:extLst>
           </p:cNvPr>
@@ -3251,7 +3251,7 @@
           <p:cNvPr id="6" name="スライド番号プレースホルダー 5">
             <a:extLst>
               <a:ext uri="{FF2B5EF4-FFF2-40B4-BE49-F238E27FC236}">
-                <a16:creationId xmlns:a16="http://schemas.microsoft.com/office/drawing/2014/main" id="{CCA7CFB4-2C33-2DDE-7ED4-2CFF37ACB386}"/>
+                <a16:creationId xmlns:a16="http://schemas.microsoft.com/office/drawing/2014/main" id="{A2488EFF-EEDC-80C5-3559-DEF02FADB3BD}"/>
               </a:ext>
             </a:extLst>
           </p:cNvPr>
@@ -3285,7 +3285,7 @@
             </a:lvl1pPr>
           </a:lstStyle>
           <a:p>
-            <a:fld id="{7BC6C0E1-D38F-4F92-82C9-5480A080A4DC}" type="slidenum">
+            <a:fld id="{12352951-C661-4FE7-ACEA-8547EF5D613A}" type="slidenum">
               <a:rPr kumimoji="1" lang="ja-JP" altLang="en-US" smtClean="0"/>
               <a:t>‹#›</a:t>
             </a:fld>
@@ -3296,7 +3296,7 @@
     </p:spTree>
     <p:extLst>
       <p:ext uri="{BB962C8B-B14F-4D97-AF65-F5344CB8AC3E}">
-        <p14:creationId xmlns:p14="http://schemas.microsoft.com/office/powerpoint/2010/main" val="684229424"/>
+        <p14:creationId xmlns:p14="http://schemas.microsoft.com/office/powerpoint/2010/main" val="2033227384"/>
       </p:ext>
     </p:extLst>
   </p:cSld>
@@ -3619,7 +3619,7 @@
           <p:cNvPr id="2" name="テキスト ボックス 1">
             <a:extLst>
               <a:ext uri="{FF2B5EF4-FFF2-40B4-BE49-F238E27FC236}">
-                <a16:creationId xmlns:a16="http://schemas.microsoft.com/office/drawing/2014/main" id="{C48DEE10-AFEB-F359-9603-21D3DF6CCEAA}"/>
+                <a16:creationId xmlns:a16="http://schemas.microsoft.com/office/drawing/2014/main" id="{C7D3B60A-9EE9-1856-EAC0-FC6D7A9397E7}"/>
               </a:ext>
             </a:extLst>
           </p:cNvPr>
@@ -3665,7 +3665,7 @@
           <p:cNvPr id="3" name="テキスト ボックス 2">
             <a:extLst>
               <a:ext uri="{FF2B5EF4-FFF2-40B4-BE49-F238E27FC236}">
-                <a16:creationId xmlns:a16="http://schemas.microsoft.com/office/drawing/2014/main" id="{FC25E298-4DFA-05A9-5AE0-2950BC13B258}"/>
+                <a16:creationId xmlns:a16="http://schemas.microsoft.com/office/drawing/2014/main" id="{B959549E-765A-AFCD-86BB-E400AAC54768}"/>
               </a:ext>
             </a:extLst>
           </p:cNvPr>
@@ -3714,7 +3714,7 @@
           <p:cNvPr id="4" name="テキスト ボックス 3">
             <a:extLst>
               <a:ext uri="{FF2B5EF4-FFF2-40B4-BE49-F238E27FC236}">
-                <a16:creationId xmlns:a16="http://schemas.microsoft.com/office/drawing/2014/main" id="{588AD9BC-B2B3-E7B5-CB6C-17A510F41512}"/>
+                <a16:creationId xmlns:a16="http://schemas.microsoft.com/office/drawing/2014/main" id="{EFCD49CC-9C00-3D47-105E-3F4D258B3762}"/>
               </a:ext>
             </a:extLst>
           </p:cNvPr>
@@ -3754,7 +3754,7 @@
           <p:cNvPr id="5" name="テキスト ボックス 4">
             <a:extLst>
               <a:ext uri="{FF2B5EF4-FFF2-40B4-BE49-F238E27FC236}">
-                <a16:creationId xmlns:a16="http://schemas.microsoft.com/office/drawing/2014/main" id="{6FA4356A-03ED-4854-1D15-5BDC16AF5257}"/>
+                <a16:creationId xmlns:a16="http://schemas.microsoft.com/office/drawing/2014/main" id="{5274E57B-5F2E-A036-F487-9C1C8C629617}"/>
               </a:ext>
             </a:extLst>
           </p:cNvPr>
@@ -3801,7 +3801,7 @@
             <a:hlinkClick r:id="" action="ppaction://media"/>
             <a:extLst>
               <a:ext uri="{FF2B5EF4-FFF2-40B4-BE49-F238E27FC236}">
-                <a16:creationId xmlns:a16="http://schemas.microsoft.com/office/drawing/2014/main" id="{D9DC8D54-80D6-2D6D-798F-D070367BAB1E}"/>
+                <a16:creationId xmlns:a16="http://schemas.microsoft.com/office/drawing/2014/main" id="{8D3441DE-D57E-54B0-6270-36C170D77EE3}"/>
               </a:ext>
             </a:extLst>
           </p:cNvPr>
@@ -3836,7 +3836,7 @@
     </p:spTree>
     <p:extLst>
       <p:ext uri="{BB962C8B-B14F-4D97-AF65-F5344CB8AC3E}">
-        <p14:creationId xmlns:p14="http://schemas.microsoft.com/office/powerpoint/2010/main" val="3494143411"/>
+        <p14:creationId xmlns:p14="http://schemas.microsoft.com/office/powerpoint/2010/main" val="3921682135"/>
       </p:ext>
     </p:extLst>
   </p:cSld>
@@ -3960,7 +3960,7 @@
           <p:cNvPr id="2" name="テキスト ボックス 1">
             <a:extLst>
               <a:ext uri="{FF2B5EF4-FFF2-40B4-BE49-F238E27FC236}">
-                <a16:creationId xmlns:a16="http://schemas.microsoft.com/office/drawing/2014/main" id="{235EBEA8-7FF8-D44F-9403-D285AFBFB59C}"/>
+                <a16:creationId xmlns:a16="http://schemas.microsoft.com/office/drawing/2014/main" id="{451DB93C-28EE-2DC2-B71F-B9B964D9224D}"/>
               </a:ext>
             </a:extLst>
           </p:cNvPr>
@@ -4006,7 +4006,7 @@
           <p:cNvPr id="3" name="テキスト ボックス 2">
             <a:extLst>
               <a:ext uri="{FF2B5EF4-FFF2-40B4-BE49-F238E27FC236}">
-                <a16:creationId xmlns:a16="http://schemas.microsoft.com/office/drawing/2014/main" id="{5FCA7719-8FA0-43E1-A864-0E4920F0B4B8}"/>
+                <a16:creationId xmlns:a16="http://schemas.microsoft.com/office/drawing/2014/main" id="{420E54BF-8C16-493E-007E-D1EA3B85F753}"/>
               </a:ext>
             </a:extLst>
           </p:cNvPr>
@@ -4046,7 +4046,7 @@
           <p:cNvPr id="4" name="テキスト ボックス 3">
             <a:extLst>
               <a:ext uri="{FF2B5EF4-FFF2-40B4-BE49-F238E27FC236}">
-                <a16:creationId xmlns:a16="http://schemas.microsoft.com/office/drawing/2014/main" id="{0B2F1E86-9687-AB3F-BCD9-7CF5DCFD6C70}"/>
+                <a16:creationId xmlns:a16="http://schemas.microsoft.com/office/drawing/2014/main" id="{60D38172-FE55-7D7A-ABC7-A5476455BF85}"/>
               </a:ext>
             </a:extLst>
           </p:cNvPr>
@@ -4076,14 +4076,17 @@
                 </a:solidFill>
                 <a:latin typeface="Arial" panose="020B0604020202020204" pitchFamily="34" charset="0"/>
               </a:rPr>
-              <a:t>Eki Genre Map Recommended repository: eki genre map Confirmed domain: ekigenre</a:t>
-            </a:r>
-            <a:endParaRPr kumimoji="1" lang="ja-JP" altLang="en-US" sz="2000">
-              <a:solidFill>
-                <a:srgbClr val="333333"/>
-              </a:solidFill>
-              <a:latin typeface="Arial" panose="020B0604020202020204" pitchFamily="34" charset="0"/>
-            </a:endParaRPr>
+              <a:t>Eki Genre Map</a:t>
+            </a:r>
+            <a:r>
+              <a:rPr kumimoji="1" lang="ja-JP" altLang="en-US" sz="2000">
+                <a:solidFill>
+                  <a:srgbClr val="333333"/>
+                </a:solidFill>
+                <a:latin typeface="Arial" panose="020B0604020202020204" pitchFamily="34" charset="0"/>
+              </a:rPr>
+              <a:t>の目的、構成、実装を公開コードから確認できるプロジェクトです。</a:t>
+            </a:r>
           </a:p>
         </p:txBody>
       </p:sp>
@@ -4092,7 +4095,7 @@
           <p:cNvPr id="5" name="テキスト ボックス 4">
             <a:extLst>
               <a:ext uri="{FF2B5EF4-FFF2-40B4-BE49-F238E27FC236}">
-                <a16:creationId xmlns:a16="http://schemas.microsoft.com/office/drawing/2014/main" id="{870724F9-1B9F-0A6C-B971-F14633A02FA5}"/>
+                <a16:creationId xmlns:a16="http://schemas.microsoft.com/office/drawing/2014/main" id="{1F4C94E7-13A8-960A-68D6-BD131ABCA988}"/>
               </a:ext>
             </a:extLst>
           </p:cNvPr>
@@ -4139,7 +4142,7 @@
             <a:hlinkClick r:id="" action="ppaction://media"/>
             <a:extLst>
               <a:ext uri="{FF2B5EF4-FFF2-40B4-BE49-F238E27FC236}">
-                <a16:creationId xmlns:a16="http://schemas.microsoft.com/office/drawing/2014/main" id="{C0898893-9E57-3395-887A-60E418DC0B84}"/>
+                <a16:creationId xmlns:a16="http://schemas.microsoft.com/office/drawing/2014/main" id="{7D2FA4C4-471F-8C87-0EF4-2DE4EFDB8E9E}"/>
               </a:ext>
             </a:extLst>
           </p:cNvPr>
@@ -4174,7 +4177,7 @@
     </p:spTree>
     <p:extLst>
       <p:ext uri="{BB962C8B-B14F-4D97-AF65-F5344CB8AC3E}">
-        <p14:creationId xmlns:p14="http://schemas.microsoft.com/office/powerpoint/2010/main" val="2873730039"/>
+        <p14:creationId xmlns:p14="http://schemas.microsoft.com/office/powerpoint/2010/main" val="705230393"/>
       </p:ext>
     </p:extLst>
   </p:cSld>
@@ -4183,10 +4186,10 @@
   </p:clrMapOvr>
   <mc:AlternateContent xmlns:mc="http://schemas.openxmlformats.org/markup-compatibility/2006">
     <mc:Choice xmlns:p14="http://schemas.microsoft.com/office/powerpoint/2010/main" Requires="p14">
-      <p:transition spd="slow" p14:dur="2000" advTm="7000"/>
+      <p:transition spd="slow" p14:dur="2000" advTm="8000"/>
     </mc:Choice>
     <mc:Fallback>
-      <p:transition spd="slow" advTm="7000"/>
+      <p:transition spd="slow" advTm="8000"/>
     </mc:Fallback>
   </mc:AlternateContent>
   <p:timing>
@@ -4217,7 +4220,7 @@
                                   <p:childTnLst>
                                     <p:cmd type="call" cmd="playFrom(0.0)">
                                       <p:cBhvr>
-                                        <p:cTn id="6" dur="6816" fill="hold"/>
+                                        <p:cTn id="6" dur="7186" fill="hold"/>
                                         <p:tgtEl>
                                           <p:spTgt spid="6"/>
                                         </p:tgtEl>
@@ -4298,7 +4301,7 @@
           <p:cNvPr id="2" name="テキスト ボックス 1">
             <a:extLst>
               <a:ext uri="{FF2B5EF4-FFF2-40B4-BE49-F238E27FC236}">
-                <a16:creationId xmlns:a16="http://schemas.microsoft.com/office/drawing/2014/main" id="{E4EB86C0-F38D-2059-4738-2751BA5B9519}"/>
+                <a16:creationId xmlns:a16="http://schemas.microsoft.com/office/drawing/2014/main" id="{53AAA086-C0FE-A85F-FDAA-1F011E3F74DF}"/>
               </a:ext>
             </a:extLst>
           </p:cNvPr>
@@ -4344,7 +4347,7 @@
           <p:cNvPr id="3" name="テキスト ボックス 2">
             <a:extLst>
               <a:ext uri="{FF2B5EF4-FFF2-40B4-BE49-F238E27FC236}">
-                <a16:creationId xmlns:a16="http://schemas.microsoft.com/office/drawing/2014/main" id="{4D07684F-A8DE-312A-0403-6AC17B95E401}"/>
+                <a16:creationId xmlns:a16="http://schemas.microsoft.com/office/drawing/2014/main" id="{E20A8DA5-37D2-C13D-3F2B-286556BFA88D}"/>
               </a:ext>
             </a:extLst>
           </p:cNvPr>
@@ -4384,7 +4387,7 @@
           <p:cNvPr id="4" name="テキスト ボックス 3">
             <a:extLst>
               <a:ext uri="{FF2B5EF4-FFF2-40B4-BE49-F238E27FC236}">
-                <a16:creationId xmlns:a16="http://schemas.microsoft.com/office/drawing/2014/main" id="{F0266895-A6B5-1061-9F1C-FEACB6EB1E2B}"/>
+                <a16:creationId xmlns:a16="http://schemas.microsoft.com/office/drawing/2014/main" id="{22F2954B-31AA-084A-3F6C-E9E81E3638AE}"/>
               </a:ext>
             </a:extLst>
           </p:cNvPr>
@@ -4479,7 +4482,7 @@
           <p:cNvPr id="5" name="テキスト ボックス 4">
             <a:extLst>
               <a:ext uri="{FF2B5EF4-FFF2-40B4-BE49-F238E27FC236}">
-                <a16:creationId xmlns:a16="http://schemas.microsoft.com/office/drawing/2014/main" id="{4634D5AD-8DBA-D895-6841-8650BDF3168B}"/>
+                <a16:creationId xmlns:a16="http://schemas.microsoft.com/office/drawing/2014/main" id="{6FB78B9B-CBC4-6210-22A8-915F67D1AD80}"/>
               </a:ext>
             </a:extLst>
           </p:cNvPr>
@@ -4526,7 +4529,7 @@
             <a:hlinkClick r:id="" action="ppaction://media"/>
             <a:extLst>
               <a:ext uri="{FF2B5EF4-FFF2-40B4-BE49-F238E27FC236}">
-                <a16:creationId xmlns:a16="http://schemas.microsoft.com/office/drawing/2014/main" id="{36C917CB-B750-BF5F-0FB3-C512F2584C82}"/>
+                <a16:creationId xmlns:a16="http://schemas.microsoft.com/office/drawing/2014/main" id="{FDB4681A-4D8F-54FA-964C-B9A30380C985}"/>
               </a:ext>
             </a:extLst>
           </p:cNvPr>
@@ -4561,7 +4564,7 @@
     </p:spTree>
     <p:extLst>
       <p:ext uri="{BB962C8B-B14F-4D97-AF65-F5344CB8AC3E}">
-        <p14:creationId xmlns:p14="http://schemas.microsoft.com/office/powerpoint/2010/main" val="665511385"/>
+        <p14:creationId xmlns:p14="http://schemas.microsoft.com/office/powerpoint/2010/main" val="1030923689"/>
       </p:ext>
     </p:extLst>
   </p:cSld>
@@ -4685,7 +4688,7 @@
           <p:cNvPr id="2" name="テキスト ボックス 1">
             <a:extLst>
               <a:ext uri="{FF2B5EF4-FFF2-40B4-BE49-F238E27FC236}">
-                <a16:creationId xmlns:a16="http://schemas.microsoft.com/office/drawing/2014/main" id="{9D2C3C9D-E961-B1C8-6B2C-3C778CD173DF}"/>
+                <a16:creationId xmlns:a16="http://schemas.microsoft.com/office/drawing/2014/main" id="{582DBE86-5408-FA2C-AFC5-6198F8DC580F}"/>
               </a:ext>
             </a:extLst>
           </p:cNvPr>
@@ -4731,7 +4734,7 @@
           <p:cNvPr id="3" name="テキスト ボックス 2">
             <a:extLst>
               <a:ext uri="{FF2B5EF4-FFF2-40B4-BE49-F238E27FC236}">
-                <a16:creationId xmlns:a16="http://schemas.microsoft.com/office/drawing/2014/main" id="{521E39F7-223F-CDEE-FBDA-EF47A029054F}"/>
+                <a16:creationId xmlns:a16="http://schemas.microsoft.com/office/drawing/2014/main" id="{28D9D932-4E42-18F0-0CF8-E41C5092E407}"/>
               </a:ext>
             </a:extLst>
           </p:cNvPr>
@@ -4771,7 +4774,7 @@
           <p:cNvPr id="4" name="テキスト ボックス 3">
             <a:extLst>
               <a:ext uri="{FF2B5EF4-FFF2-40B4-BE49-F238E27FC236}">
-                <a16:creationId xmlns:a16="http://schemas.microsoft.com/office/drawing/2014/main" id="{60F99FE0-6D05-B109-A9B7-D36ED23E41F7}"/>
+                <a16:creationId xmlns:a16="http://schemas.microsoft.com/office/drawing/2014/main" id="{D01B7C6F-18C4-6CD2-CFAC-AB666491C0AD}"/>
               </a:ext>
             </a:extLst>
           </p:cNvPr>
@@ -4881,7 +4884,7 @@
           <p:cNvPr id="5" name="テキスト ボックス 4">
             <a:extLst>
               <a:ext uri="{FF2B5EF4-FFF2-40B4-BE49-F238E27FC236}">
-                <a16:creationId xmlns:a16="http://schemas.microsoft.com/office/drawing/2014/main" id="{DDD21506-7EDE-A9F3-C782-DD30EAFFE8C8}"/>
+                <a16:creationId xmlns:a16="http://schemas.microsoft.com/office/drawing/2014/main" id="{23CFDC84-752F-6695-7121-F216B117C264}"/>
               </a:ext>
             </a:extLst>
           </p:cNvPr>
@@ -4928,7 +4931,7 @@
             <a:hlinkClick r:id="" action="ppaction://media"/>
             <a:extLst>
               <a:ext uri="{FF2B5EF4-FFF2-40B4-BE49-F238E27FC236}">
-                <a16:creationId xmlns:a16="http://schemas.microsoft.com/office/drawing/2014/main" id="{174CA98F-1BB4-8405-76A4-E5FF5867DE38}"/>
+                <a16:creationId xmlns:a16="http://schemas.microsoft.com/office/drawing/2014/main" id="{F5EC4B13-E131-ED58-7B88-FCDD3627F830}"/>
               </a:ext>
             </a:extLst>
           </p:cNvPr>
@@ -4963,7 +4966,7 @@
     </p:spTree>
     <p:extLst>
       <p:ext uri="{BB962C8B-B14F-4D97-AF65-F5344CB8AC3E}">
-        <p14:creationId xmlns:p14="http://schemas.microsoft.com/office/powerpoint/2010/main" val="3092671333"/>
+        <p14:creationId xmlns:p14="http://schemas.microsoft.com/office/powerpoint/2010/main" val="3487608270"/>
       </p:ext>
     </p:extLst>
   </p:cSld>
@@ -5087,7 +5090,7 @@
           <p:cNvPr id="2" name="テキスト ボックス 1">
             <a:extLst>
               <a:ext uri="{FF2B5EF4-FFF2-40B4-BE49-F238E27FC236}">
-                <a16:creationId xmlns:a16="http://schemas.microsoft.com/office/drawing/2014/main" id="{128EA675-7360-6228-F499-7633BE55060B}"/>
+                <a16:creationId xmlns:a16="http://schemas.microsoft.com/office/drawing/2014/main" id="{FFC4C0D7-708C-0D2B-1F80-704A17D78970}"/>
               </a:ext>
             </a:extLst>
           </p:cNvPr>
@@ -5133,7 +5136,7 @@
           <p:cNvPr id="3" name="テキスト ボックス 2">
             <a:extLst>
               <a:ext uri="{FF2B5EF4-FFF2-40B4-BE49-F238E27FC236}">
-                <a16:creationId xmlns:a16="http://schemas.microsoft.com/office/drawing/2014/main" id="{6171E6D5-C84A-552B-CA00-3065F4D250BB}"/>
+                <a16:creationId xmlns:a16="http://schemas.microsoft.com/office/drawing/2014/main" id="{482C1A4A-B07F-0F26-9F51-A236E79B5C1F}"/>
               </a:ext>
             </a:extLst>
           </p:cNvPr>
@@ -5173,7 +5176,7 @@
           <p:cNvPr id="4" name="テキスト ボックス 3">
             <a:extLst>
               <a:ext uri="{FF2B5EF4-FFF2-40B4-BE49-F238E27FC236}">
-                <a16:creationId xmlns:a16="http://schemas.microsoft.com/office/drawing/2014/main" id="{04765D6A-5201-F31D-BAC6-AD3936604EB0}"/>
+                <a16:creationId xmlns:a16="http://schemas.microsoft.com/office/drawing/2014/main" id="{E67EF9FD-2B29-F9E8-F357-310538A98344}"/>
               </a:ext>
             </a:extLst>
           </p:cNvPr>
@@ -5197,20 +5200,14 @@
           <a:lstStyle/>
           <a:p>
             <a:r>
-              <a:rPr kumimoji="1" lang="en-US" altLang="ja-JP" sz="2000">
+              <a:rPr kumimoji="1" lang="ja-JP" altLang="en-US" sz="2000">
                 <a:solidFill>
                   <a:srgbClr val="333333"/>
                 </a:solidFill>
                 <a:latin typeface="Arial" panose="020B0604020202020204" pitchFamily="34" charset="0"/>
               </a:rPr>
-              <a:t>Set confirmed custom domain</a:t>
-            </a:r>
-            <a:endParaRPr kumimoji="1" lang="ja-JP" altLang="en-US" sz="2000">
-              <a:solidFill>
-                <a:srgbClr val="333333"/>
-              </a:solidFill>
-              <a:latin typeface="Arial" panose="020B0604020202020204" pitchFamily="34" charset="0"/>
-            </a:endParaRPr>
+              <a:t>直近のコミットでは、実装の見直しと継続的な改善が行われました。</a:t>
+            </a:r>
           </a:p>
         </p:txBody>
       </p:sp>
@@ -5219,7 +5216,7 @@
           <p:cNvPr id="5" name="テキスト ボックス 4">
             <a:extLst>
               <a:ext uri="{FF2B5EF4-FFF2-40B4-BE49-F238E27FC236}">
-                <a16:creationId xmlns:a16="http://schemas.microsoft.com/office/drawing/2014/main" id="{33D08FC9-156B-B959-34C6-C7164D81BD6E}"/>
+                <a16:creationId xmlns:a16="http://schemas.microsoft.com/office/drawing/2014/main" id="{69194F3C-D3ED-5B9D-8A23-5B632FFEBFC5}"/>
               </a:ext>
             </a:extLst>
           </p:cNvPr>
@@ -5266,7 +5263,7 @@
             <a:hlinkClick r:id="" action="ppaction://media"/>
             <a:extLst>
               <a:ext uri="{FF2B5EF4-FFF2-40B4-BE49-F238E27FC236}">
-                <a16:creationId xmlns:a16="http://schemas.microsoft.com/office/drawing/2014/main" id="{823E95C8-C2D2-8CFE-78D9-3793B16A48C5}"/>
+                <a16:creationId xmlns:a16="http://schemas.microsoft.com/office/drawing/2014/main" id="{FB16B92A-0EF5-AF43-BCD7-5B6B1BD25701}"/>
               </a:ext>
             </a:extLst>
           </p:cNvPr>
@@ -5301,7 +5298,7 @@
     </p:spTree>
     <p:extLst>
       <p:ext uri="{BB962C8B-B14F-4D97-AF65-F5344CB8AC3E}">
-        <p14:creationId xmlns:p14="http://schemas.microsoft.com/office/powerpoint/2010/main" val="2623972260"/>
+        <p14:creationId xmlns:p14="http://schemas.microsoft.com/office/powerpoint/2010/main" val="3208695622"/>
       </p:ext>
     </p:extLst>
   </p:cSld>
@@ -5344,7 +5341,7 @@
                                   <p:childTnLst>
                                     <p:cmd type="call" cmd="playFrom(0.0)">
                                       <p:cBhvr>
-                                        <p:cTn id="6" dur="6451" fill="hold"/>
+                                        <p:cTn id="6" dur="6076" fill="hold"/>
                                         <p:tgtEl>
                                           <p:spTgt spid="6"/>
                                         </p:tgtEl>
@@ -5425,7 +5422,7 @@
           <p:cNvPr id="2" name="テキスト ボックス 1">
             <a:extLst>
               <a:ext uri="{FF2B5EF4-FFF2-40B4-BE49-F238E27FC236}">
-                <a16:creationId xmlns:a16="http://schemas.microsoft.com/office/drawing/2014/main" id="{66EEDAA5-3C2A-7FAD-4E7F-CB1CDF94824C}"/>
+                <a16:creationId xmlns:a16="http://schemas.microsoft.com/office/drawing/2014/main" id="{C7171245-77F5-FC97-C3CE-4EE13EC14068}"/>
               </a:ext>
             </a:extLst>
           </p:cNvPr>
@@ -5471,7 +5468,7 @@
           <p:cNvPr id="3" name="テキスト ボックス 2">
             <a:extLst>
               <a:ext uri="{FF2B5EF4-FFF2-40B4-BE49-F238E27FC236}">
-                <a16:creationId xmlns:a16="http://schemas.microsoft.com/office/drawing/2014/main" id="{3F833599-D69D-BC50-080D-8E1CA6652B78}"/>
+                <a16:creationId xmlns:a16="http://schemas.microsoft.com/office/drawing/2014/main" id="{52334834-5D7B-47A9-8B76-961127FB1D82}"/>
               </a:ext>
             </a:extLst>
           </p:cNvPr>
@@ -5511,7 +5508,7 @@
           <p:cNvPr id="4" name="テキスト ボックス 3">
             <a:extLst>
               <a:ext uri="{FF2B5EF4-FFF2-40B4-BE49-F238E27FC236}">
-                <a16:creationId xmlns:a16="http://schemas.microsoft.com/office/drawing/2014/main" id="{72EA0F3C-A37F-CCD3-EBFA-A6C609AFCE29}"/>
+                <a16:creationId xmlns:a16="http://schemas.microsoft.com/office/drawing/2014/main" id="{9F3C548A-1A6E-AC29-EA0D-C6588BF25DF5}"/>
               </a:ext>
             </a:extLst>
           </p:cNvPr>
@@ -5576,7 +5573,7 @@
           <p:cNvPr id="5" name="テキスト ボックス 4">
             <a:extLst>
               <a:ext uri="{FF2B5EF4-FFF2-40B4-BE49-F238E27FC236}">
-                <a16:creationId xmlns:a16="http://schemas.microsoft.com/office/drawing/2014/main" id="{EB8EAB28-F5E1-2A6F-3FCD-F0DAFBAB8B7F}"/>
+                <a16:creationId xmlns:a16="http://schemas.microsoft.com/office/drawing/2014/main" id="{9063160A-0B63-CADD-0848-1D1DBED6A987}"/>
               </a:ext>
             </a:extLst>
           </p:cNvPr>
@@ -5623,7 +5620,7 @@
             <a:hlinkClick r:id="" action="ppaction://media"/>
             <a:extLst>
               <a:ext uri="{FF2B5EF4-FFF2-40B4-BE49-F238E27FC236}">
-                <a16:creationId xmlns:a16="http://schemas.microsoft.com/office/drawing/2014/main" id="{0FFC1B93-E8C7-4B25-70A4-11E465D73850}"/>
+                <a16:creationId xmlns:a16="http://schemas.microsoft.com/office/drawing/2014/main" id="{6E8A883B-5D32-6D70-F3AC-DF777E76291D}"/>
               </a:ext>
             </a:extLst>
           </p:cNvPr>
@@ -5658,7 +5655,7 @@
     </p:spTree>
     <p:extLst>
       <p:ext uri="{BB962C8B-B14F-4D97-AF65-F5344CB8AC3E}">
-        <p14:creationId xmlns:p14="http://schemas.microsoft.com/office/powerpoint/2010/main" val="2989091471"/>
+        <p14:creationId xmlns:p14="http://schemas.microsoft.com/office/powerpoint/2010/main" val="1961719737"/>
       </p:ext>
     </p:extLst>
   </p:cSld>
